--- a/SDC/教学资料/课件/T1-标准与规范.pptx
+++ b/SDC/教学资料/课件/T1-标准与规范.pptx
@@ -1616,6 +1616,11 @@
               <a:t>权衡：哪一种口径更合适取决于需求；关键是先写明口径，再比较结果。后文的学生成绩统计函数采用按学分加权。</a:t>
             </a:r>
           </a:p>
+          <a:p>
+            <a:r>
+              <a:t>取舍：可选——时间不足时略去，不影响本课重点、后续理解与作业。</a:t>
+            </a:r>
+          </a:p>
         </p:txBody>
       </p:sp>
       <p:sp>
@@ -4797,6 +4802,11 @@
               <a:t>权衡：边界收窄便于验证，代价是后续需求变化时要另行补充。</a:t>
             </a:r>
           </a:p>
+          <a:p>
+            <a:r>
+              <a:t>取舍：可选——时间不足时略去，不影响本课重点、后续理解与作业。</a:t>
+            </a:r>
+          </a:p>
         </p:txBody>
       </p:sp>
       <p:sp>
@@ -5237,6 +5247,11 @@
               <a:t>权衡：“课程成绩管理规范”为教学示例设定的文件，不是真实存在的标准。</a:t>
             </a:r>
           </a:p>
+          <a:p>
+            <a:r>
+              <a:t>取舍：可选——时间不足时略去，不影响本课重点、后续理解与作业。</a:t>
+            </a:r>
+          </a:p>
         </p:txBody>
       </p:sp>
       <p:sp>
@@ -5837,6 +5852,11 @@
               <a:t>权衡：框架只当例子，原理比某一门框架存续得更久。</a:t>
             </a:r>
           </a:p>
+          <a:p>
+            <a:r>
+              <a:t>取舍：可选——时间不足时略去，不影响本课重点、后续理解与作业。</a:t>
+            </a:r>
+          </a:p>
         </p:txBody>
       </p:sp>
       <p:sp>
@@ -6185,6 +6205,11 @@
           <a:p>
             <a:r>
               <a:t>权衡：环节的细节留到各章，这里只建立地图。AI for SE 贯穿五个环节。</a:t>
+            </a:r>
+          </a:p>
+          <a:p>
+            <a:r>
+              <a:t>取舍：可选——时间不足时略去，不影响本课重点、后续理解与作业。</a:t>
             </a:r>
           </a:p>
         </p:txBody>
